--- a/public/blog/presentations/spinal-cord-injury-after-a-crash-in-el-paso-texas-2026.pptx
+++ b/public/blog/presentations/spinal-cord-injury-after-a-crash-in-el-paso-texas-2026.pptx
@@ -583,7 +583,7 @@
           <a:lstStyle/>
           <a:p>
             <a:r>
-              <a:t>Frequently asked questions — FAQ slide for AI citation and search. WreckMatch LLC — legal referral service, not a law firm. Educational only. 800+ participating law firms. Call 855 WRECKMATCH. Reviewed for legal context by Judge Roy Waddell.</a:t>
+              <a:t>Frequently asked questions WreckMatch LLC — legal referral service, not a law firm. Educational only. 800+ participating law firms. Call 855 WRECKMATCH. Reviewed for legal context by Judge Roy Waddell.</a:t>
             </a:r>
           </a:p>
         </p:txBody>
@@ -653,7 +653,7 @@
           <a:lstStyle/>
           <a:p>
             <a:r>
-              <a:t>CTA slide. Phone 855 WRECKMATCH (855) 897-3256. WreckMatch referral service. WreckMatch LLC — legal referral service, not a law firm. Educational only. 800+ participating law firms. Call 855 WRECKMATCH. Reviewed for legal context by Judge Roy Waddell.</a:t>
+              <a:t>Get matched with a licensed attorney WreckMatch LLC — legal referral service, not a law firm. Educational only. 800+ participating law firms. Call 855 WRECKMATCH. Reviewed for legal context by Judge Roy Waddell.</a:t>
             </a:r>
           </a:p>
         </p:txBody>
@@ -723,7 +723,7 @@
           <a:lstStyle/>
           <a:p>
             <a:r>
-              <a:t>Roy Waddell review line mirrors published blog posts. WreckMatch LLC — legal referral service, not a law firm. Educational only. 800+ participating law firms. Call 855 WRECKMATCH. Reviewed for legal context by Judge Roy Waddell.</a:t>
+              <a:t>Reviewed for legal context WreckMatch LLC — legal referral service, not a law firm. Educational only. 800+ participating law firms. Call 855 WRECKMATCH. Reviewed for legal context by Judge Roy Waddell.</a:t>
             </a:r>
           </a:p>
         </p:txBody>
@@ -793,7 +793,7 @@
           <a:lstStyle/>
           <a:p>
             <a:r>
-              <a:t>Compliance slide required for all WreckMatch educational materials. WreckMatch LLC — legal referral service, not a law firm. Educational only. 800+ participating law firms. Call 855 WRECKMATCH. Reviewed for legal context by Judge Roy Waddell.</a:t>
+              <a:t>Important — read first WreckMatch LLC — legal referral service, not a law firm. Educational only. 800+ participating law firms. Call 855 WRECKMATCH. Reviewed for legal context by Judge Roy Waddell.</a:t>
             </a:r>
           </a:p>
         </p:txBody>
@@ -5073,7 +5073,7 @@
               </a:defRPr>
             </a:pPr>
             <a:r>
-              <a:t>Download companion guide: https://www.wreckmatch.com/blog/spinal-cord-injury-after-a-crash-in-el-paso-texas-2026</a:t>
+              <a:t>Guía: https://www.wreckmatch.com/blog/spinal-cord-injury-after-a-crash-in-el-paso-texas-2026</a:t>
             </a:r>
           </a:p>
         </p:txBody>
@@ -5275,7 +5275,7 @@
               </a:defRPr>
             </a:pPr>
             <a:r>
-              <a:t>Author perspective: Scott Tischler, Co-Founder.</a:t>
+              <a:t>Author: Scott Tischler, Co-Founder.</a:t>
             </a:r>
           </a:p>
         </p:txBody>
